--- a/1С_Предприятие/практика 10.pptx
+++ b/1С_Предприятие/практика 10.pptx
@@ -293,7 +293,7 @@
             <a:fld id="{66544912-2369-4E75-B379-F9D63D696BE2}" type="datetimeFigureOut">
               <a:rPr lang="ru-RU" smtClean="0"/>
               <a:pPr/>
-              <a:t>05.05.2026</a:t>
+              <a:t>13.05.2026</a:t>
             </a:fld>
             <a:endParaRPr lang="ru-RU"/>
           </a:p>
@@ -460,7 +460,7 @@
             <a:fld id="{66544912-2369-4E75-B379-F9D63D696BE2}" type="datetimeFigureOut">
               <a:rPr lang="ru-RU" smtClean="0"/>
               <a:pPr/>
-              <a:t>05.05.2026</a:t>
+              <a:t>13.05.2026</a:t>
             </a:fld>
             <a:endParaRPr lang="ru-RU"/>
           </a:p>
@@ -637,7 +637,7 @@
             <a:fld id="{66544912-2369-4E75-B379-F9D63D696BE2}" type="datetimeFigureOut">
               <a:rPr lang="ru-RU" smtClean="0"/>
               <a:pPr/>
-              <a:t>05.05.2026</a:t>
+              <a:t>13.05.2026</a:t>
             </a:fld>
             <a:endParaRPr lang="ru-RU"/>
           </a:p>
@@ -804,7 +804,7 @@
             <a:fld id="{66544912-2369-4E75-B379-F9D63D696BE2}" type="datetimeFigureOut">
               <a:rPr lang="ru-RU" smtClean="0"/>
               <a:pPr/>
-              <a:t>05.05.2026</a:t>
+              <a:t>13.05.2026</a:t>
             </a:fld>
             <a:endParaRPr lang="ru-RU"/>
           </a:p>
@@ -1047,7 +1047,7 @@
             <a:fld id="{66544912-2369-4E75-B379-F9D63D696BE2}" type="datetimeFigureOut">
               <a:rPr lang="ru-RU" smtClean="0"/>
               <a:pPr/>
-              <a:t>05.05.2026</a:t>
+              <a:t>13.05.2026</a:t>
             </a:fld>
             <a:endParaRPr lang="ru-RU"/>
           </a:p>
@@ -1332,7 +1332,7 @@
             <a:fld id="{66544912-2369-4E75-B379-F9D63D696BE2}" type="datetimeFigureOut">
               <a:rPr lang="ru-RU" smtClean="0"/>
               <a:pPr/>
-              <a:t>05.05.2026</a:t>
+              <a:t>13.05.2026</a:t>
             </a:fld>
             <a:endParaRPr lang="ru-RU"/>
           </a:p>
@@ -1751,7 +1751,7 @@
             <a:fld id="{66544912-2369-4E75-B379-F9D63D696BE2}" type="datetimeFigureOut">
               <a:rPr lang="ru-RU" smtClean="0"/>
               <a:pPr/>
-              <a:t>05.05.2026</a:t>
+              <a:t>13.05.2026</a:t>
             </a:fld>
             <a:endParaRPr lang="ru-RU"/>
           </a:p>
@@ -1866,7 +1866,7 @@
             <a:fld id="{66544912-2369-4E75-B379-F9D63D696BE2}" type="datetimeFigureOut">
               <a:rPr lang="ru-RU" smtClean="0"/>
               <a:pPr/>
-              <a:t>05.05.2026</a:t>
+              <a:t>13.05.2026</a:t>
             </a:fld>
             <a:endParaRPr lang="ru-RU"/>
           </a:p>
@@ -1958,7 +1958,7 @@
             <a:fld id="{66544912-2369-4E75-B379-F9D63D696BE2}" type="datetimeFigureOut">
               <a:rPr lang="ru-RU" smtClean="0"/>
               <a:pPr/>
-              <a:t>05.05.2026</a:t>
+              <a:t>13.05.2026</a:t>
             </a:fld>
             <a:endParaRPr lang="ru-RU"/>
           </a:p>
@@ -2232,7 +2232,7 @@
             <a:fld id="{66544912-2369-4E75-B379-F9D63D696BE2}" type="datetimeFigureOut">
               <a:rPr lang="ru-RU" smtClean="0"/>
               <a:pPr/>
-              <a:t>05.05.2026</a:t>
+              <a:t>13.05.2026</a:t>
             </a:fld>
             <a:endParaRPr lang="ru-RU"/>
           </a:p>
@@ -2482,7 +2482,7 @@
             <a:fld id="{66544912-2369-4E75-B379-F9D63D696BE2}" type="datetimeFigureOut">
               <a:rPr lang="ru-RU" smtClean="0"/>
               <a:pPr/>
-              <a:t>05.05.2026</a:t>
+              <a:t>13.05.2026</a:t>
             </a:fld>
             <a:endParaRPr lang="ru-RU"/>
           </a:p>
@@ -2692,7 +2692,7 @@
             <a:fld id="{66544912-2369-4E75-B379-F9D63D696BE2}" type="datetimeFigureOut">
               <a:rPr lang="ru-RU" smtClean="0"/>
               <a:pPr/>
-              <a:t>05.05.2026</a:t>
+              <a:t>13.05.2026</a:t>
             </a:fld>
             <a:endParaRPr lang="ru-RU"/>
           </a:p>
@@ -3183,10 +3183,6 @@
               </a:rPr>
               <a:t>В крупной компании бухгалтеру не нужно видеть данные отдела кадров, а менеджеру по продажам — расчётные ведомости. Роли позволяют открыть каждому сотруднику только нужные разделы.</a:t>
             </a:r>
-            <a:endParaRPr lang="ru-RU" sz="2000" i="1" dirty="0" smtClean="0">
-              <a:latin typeface="Times New Roman" pitchFamily="18" charset="0"/>
-              <a:cs typeface="Times New Roman" pitchFamily="18" charset="0"/>
-            </a:endParaRPr>
           </a:p>
         </p:txBody>
       </p:sp>
@@ -3354,38 +3350,6 @@
           <a:chExt cx="0" cy="0"/>
         </a:xfrm>
       </p:grpSpPr>
-      <p:sp>
-        <p:nvSpPr>
-          <p:cNvPr id="2" name="Заголовок 1"/>
-          <p:cNvSpPr>
-            <a:spLocks noGrp="1"/>
-          </p:cNvSpPr>
-          <p:nvPr>
-            <p:ph type="title"/>
-          </p:nvPr>
-        </p:nvSpPr>
-        <p:spPr>
-          <a:xfrm>
-            <a:off x="428596" y="-285776"/>
-            <a:ext cx="8229600" cy="1143000"/>
-          </a:xfrm>
-        </p:spPr>
-        <p:txBody>
-          <a:bodyPr/>
-          <a:lstStyle/>
-          <a:p>
-            <a:r>
-              <a:rPr lang="ru-RU" dirty="0" smtClean="0"/>
-              <a:t>Обработка </a:t>
-            </a:r>
-            <a:r>
-              <a:rPr lang="ru-RU" dirty="0" err="1" smtClean="0"/>
-              <a:t>ГенераторЦитат</a:t>
-            </a:r>
-            <a:endParaRPr lang="ru-RU" dirty="0"/>
-          </a:p>
-        </p:txBody>
-      </p:sp>
       <p:pic>
         <p:nvPicPr>
           <p:cNvPr id="3" name="Picture 2"/>
@@ -3421,7 +3385,7 @@
       </p:pic>
       <p:pic>
         <p:nvPicPr>
-          <p:cNvPr id="4" name="Picture 3"/>
+          <p:cNvPr id="3074" name="Picture 2" descr="https://sun9-2.userapi.com/s/v1/ig2/Lk6huV9jxICWLEUKrYtfmGTWyp1eO2m_qontMTOYRmVrUlv4IQd4VegIx1klMleNPcqy5MO-TLwO84vV2kkaXMTp.jpg?quality=95&amp;as=32x21,48x31,72x46,108x69,160x103,240x154,360x231,480x308,540x346,640x410,720x462,747x479&amp;from=bu&amp;u=e6cyuW1nH-atSRHfVJ5DnSeS997PtAkB2sDcjCsj5Ac&amp;cs=747x0"/>
           <p:cNvPicPr>
             <a:picLocks noChangeAspect="1" noChangeArrowheads="1"/>
           </p:cNvPicPr>
@@ -3436,22 +3400,47 @@
         </p:blipFill>
         <p:spPr bwMode="auto">
           <a:xfrm>
-            <a:off x="4086225" y="1643050"/>
-            <a:ext cx="5057775" cy="1666875"/>
+            <a:off x="3500430" y="571480"/>
+            <a:ext cx="5357818" cy="3435603"/>
           </a:xfrm>
           <a:prstGeom prst="rect">
             <a:avLst/>
           </a:prstGeom>
           <a:noFill/>
-          <a:ln w="9525">
-            <a:noFill/>
-            <a:miter lim="800000"/>
-            <a:headEnd/>
-            <a:tailEnd/>
-          </a:ln>
-          <a:effectLst/>
         </p:spPr>
       </p:pic>
+      <p:sp>
+        <p:nvSpPr>
+          <p:cNvPr id="2" name="Заголовок 1"/>
+          <p:cNvSpPr>
+            <a:spLocks noGrp="1"/>
+          </p:cNvSpPr>
+          <p:nvPr>
+            <p:ph type="title"/>
+          </p:nvPr>
+        </p:nvSpPr>
+        <p:spPr>
+          <a:xfrm>
+            <a:off x="428596" y="-285776"/>
+            <a:ext cx="8229600" cy="1143000"/>
+          </a:xfrm>
+        </p:spPr>
+        <p:txBody>
+          <a:bodyPr/>
+          <a:lstStyle/>
+          <a:p>
+            <a:r>
+              <a:rPr lang="ru-RU" dirty="0" smtClean="0"/>
+              <a:t>Обработка </a:t>
+            </a:r>
+            <a:r>
+              <a:rPr lang="ru-RU" dirty="0" err="1" smtClean="0"/>
+              <a:t>ГенераторЦитат</a:t>
+            </a:r>
+            <a:endParaRPr lang="ru-RU" dirty="0"/>
+          </a:p>
+        </p:txBody>
+      </p:sp>
       <p:pic>
         <p:nvPicPr>
           <p:cNvPr id="2050" name="Picture 2"/>
@@ -3878,28 +3867,7 @@
                 <a:latin typeface="Times New Roman" pitchFamily="18" charset="0"/>
                 <a:cs typeface="Times New Roman" pitchFamily="18" charset="0"/>
               </a:rPr>
-              <a:t> или сообщение </a:t>
-            </a:r>
-            <a:r>
-              <a:rPr lang="ru-RU" i="1" dirty="0" smtClean="0">
-                <a:latin typeface="Times New Roman" pitchFamily="18" charset="0"/>
-                <a:cs typeface="Times New Roman" pitchFamily="18" charset="0"/>
-              </a:rPr>
-              <a:t>при </a:t>
-            </a:r>
-            <a:r>
-              <a:rPr lang="ru-RU" i="1" dirty="0" smtClean="0">
-                <a:latin typeface="Times New Roman" pitchFamily="18" charset="0"/>
-                <a:cs typeface="Times New Roman" pitchFamily="18" charset="0"/>
-              </a:rPr>
-              <a:t>создании нового заказа, а клиенту автоматически отправляется напоминание при просрочке </a:t>
-            </a:r>
-            <a:r>
-              <a:rPr lang="ru-RU" i="1" dirty="0" smtClean="0">
-                <a:latin typeface="Times New Roman" pitchFamily="18" charset="0"/>
-                <a:cs typeface="Times New Roman" pitchFamily="18" charset="0"/>
-              </a:rPr>
-              <a:t>оплаты</a:t>
+              <a:t> или сообщение при создании нового заказа, а клиенту автоматически отправляется напоминание при просрочке оплаты</a:t>
             </a:r>
             <a:r>
               <a:rPr lang="en-US" i="1" dirty="0" smtClean="0">
